--- a/gallery/renders/title_body_basic.pptx
+++ b/gallery/renders/title_body_basic.pptx
@@ -46,21 +46,27 @@
           <a:bodyPr wrap="square" lIns="0" rIns="0" tIns="0" bIns="0"/>
           <a:lstStyle/>
           <a:p>
-            <a:pPr algn="l"/>
+            <a:pPr algn="l" lvl="0" marL="342900" indent="-342900">
+              <a:buFont typeface="Arial"/>
+              <a:buChar char="•"/>
+            </a:pPr>
             <a:r>
               <a:rPr lang="en-US" sz="2400">
                 <a:latin typeface="Arial"/>
               </a:rPr>
-              <a:t>- Launch metrics exceeded goal</a:t>
+              <a:t>Launch metrics exceeded goal</a:t>
             </a:r>
           </a:p>
           <a:p>
-            <a:pPr algn="l"/>
+            <a:pPr algn="l" lvl="0" marL="342900" indent="-342900">
+              <a:buFont typeface="Arial"/>
+              <a:buChar char="•"/>
+            </a:pPr>
             <a:r>
               <a:rPr lang="en-US" sz="2400">
                 <a:latin typeface="Arial"/>
               </a:rPr>
-              <a:t>- Onboarded 3 pilot customers</a:t>
+              <a:t>Onboarded 3 pilot customers</a:t>
             </a:r>
           </a:p>
         </p:txBody>
@@ -85,7 +91,9 @@
           <a:bodyPr wrap="square" lIns="0" rIns="0" tIns="0" bIns="0"/>
           <a:lstStyle/>
           <a:p>
-            <a:pPr algn="l"/>
+            <a:pPr algn="l">
+              <a:buNone/>
+            </a:pPr>
             <a:r>
               <a:rPr lang="en-US" sz="4000" b="1">
                 <a:latin typeface="Arial"/>

--- a/gallery/renders/title_body_basic.pptx
+++ b/gallery/renders/title_body_basic.pptx
@@ -35,7 +35,7 @@
         <p:spPr>
           <a:xfrm>
             <a:off x="910336" y="2092147"/>
-            <a:ext cx="11184128" cy="4096512"/>
+            <a:ext cx="11184128" cy="841248"/>
           </a:xfrm>
           <a:prstGeom prst="rect">
             <a:avLst/>
@@ -80,7 +80,7 @@
         <p:spPr>
           <a:xfrm>
             <a:off x="910336" y="687628"/>
-            <a:ext cx="11184128" cy="1141171"/>
+            <a:ext cx="11184128" cy="609599"/>
           </a:xfrm>
           <a:prstGeom prst="rect">
             <a:avLst/>

--- a/gallery/renders/title_body_basic.pptx
+++ b/gallery/renders/title_body_basic.pptx
@@ -35,7 +35,7 @@
         <p:spPr>
           <a:xfrm>
             <a:off x="910336" y="2092147"/>
-            <a:ext cx="11184128" cy="841248"/>
+            <a:ext cx="11184128" cy="731520"/>
           </a:xfrm>
           <a:prstGeom prst="rect">
             <a:avLst/>
@@ -80,7 +80,7 @@
         <p:spPr>
           <a:xfrm>
             <a:off x="910336" y="687628"/>
-            <a:ext cx="11184128" cy="609599"/>
+            <a:ext cx="11184128" cy="609600"/>
           </a:xfrm>
           <a:prstGeom prst="rect">
             <a:avLst/>

--- a/gallery/renders/title_body_basic.pptx
+++ b/gallery/renders/title_body_basic.pptx
@@ -35,7 +35,7 @@
         <p:spPr>
           <a:xfrm>
             <a:off x="910336" y="2092147"/>
-            <a:ext cx="11184128" cy="731520"/>
+            <a:ext cx="11184128" cy="746760"/>
           </a:xfrm>
           <a:prstGeom prst="rect">
             <a:avLst/>
@@ -80,7 +80,7 @@
         <p:spPr>
           <a:xfrm>
             <a:off x="910336" y="687628"/>
-            <a:ext cx="11184128" cy="609600"/>
+            <a:ext cx="11184128" cy="609599"/>
           </a:xfrm>
           <a:prstGeom prst="rect">
             <a:avLst/>
